--- a/tests/testresults/script_IQSlidedeck_IQobjects_Default_16_9.pptx
+++ b/tests/testresults/script_IQSlidedeck_IQobjects_Default_16_9.pptx
@@ -5968,7 +5968,7 @@
               <a:rPr/>
               <a:t>IQR Objects (non-QCed)
 Daniel Kaschek, IntiQuan
-2026-06-09</a:t>
+2026-06-25</a:t>
             </a:r>
           </a:p>
         </p:txBody>
@@ -6106,7 +6106,7 @@
           <a:p>
             <a:r>
               <a:rPr/>
-              <a:t>script_IQSlidedeck.R | Date: 2026-06-09 09:47:06.949497</a:t>
+              <a:t>script_IQSlidedeck.R | Date: 2026-06-25 13:42:34.215137</a:t>
             </a:r>
           </a:p>
         </p:txBody>
@@ -6474,7 +6474,7 @@
           <a:p>
             <a:r>
               <a:rPr/>
-              <a:t>script_IQSlidedeck.R | Date: 2026-06-09 09:47:07.894159</a:t>
+              <a:t>script_IQSlidedeck.R | Date: 2026-06-25 13:42:35.869257</a:t>
             </a:r>
           </a:p>
         </p:txBody>
@@ -6842,7 +6842,7 @@
           <a:p>
             <a:r>
               <a:rPr/>
-              <a:t>script_IQSlidedeck.R | Date: 2026-06-09 09:47:09.029357</a:t>
+              <a:t>script_IQSlidedeck.R | Date: 2026-06-25 13:42:37.091803</a:t>
             </a:r>
           </a:p>
         </p:txBody>
@@ -7032,7 +7032,7 @@
           <a:p>
             <a:r>
               <a:rPr/>
-              <a:t>script_IQSlidedeck.R | Date: 2026-06-09 09:47:17.913721</a:t>
+              <a:t>script_IQSlidedeck.R | Date: 2026-06-25 13:42:47.747289</a:t>
             </a:r>
           </a:p>
         </p:txBody>
@@ -7163,7 +7163,7 @@
           <a:p>
             <a:r>
               <a:rPr/>
-              <a:t>script_IQSlidedeck.R | Date: 2026-06-09 09:47:17.981216</a:t>
+              <a:t>script_IQSlidedeck.R | Date: 2026-06-25 13:42:47.800125</a:t>
             </a:r>
           </a:p>
         </p:txBody>
@@ -7323,7 +7323,7 @@
           <a:p>
             <a:r>
               <a:rPr/>
-              <a:t>script_IQSlidedeck.R | Date: 2026-06-09 09:47:18.055995</a:t>
+              <a:t>script_IQSlidedeck.R | Date: 2026-06-25 13:42:47.859144</a:t>
             </a:r>
           </a:p>
         </p:txBody>
@@ -7461,7 +7461,7 @@
           <a:p>
             <a:r>
               <a:rPr/>
-              <a:t>script_IQSlidedeck.R | Date: 2026-06-09 09:47:18.126241</a:t>
+              <a:t>script_IQSlidedeck.R | Date: 2026-06-25 13:42:47.917594</a:t>
             </a:r>
           </a:p>
         </p:txBody>
@@ -7900,7 +7900,7 @@
           <a:p>
             <a:r>
               <a:rPr/>
-              <a:t>IQSlidedeck_IQRobjects.R | Date: 2026-06-09 09:48:12.23004</a:t>
+              <a:t>IQSlidedeck_IQRobjects.R | Date: 2026-06-25 13:43:40.68891</a:t>
             </a:r>
           </a:p>
         </p:txBody>
@@ -8339,7 +8339,7 @@
           <a:p>
             <a:r>
               <a:rPr/>
-              <a:t>IQSlidedeck_IQRobjects.R | Date: 2026-06-09 09:48:14.337468</a:t>
+              <a:t>IQSlidedeck_IQRobjects.R | Date: 2026-06-25 13:43:42.166547</a:t>
             </a:r>
           </a:p>
         </p:txBody>
@@ -8726,7 +8726,7 @@
           <a:p>
             <a:r>
               <a:rPr/>
-              <a:t>IQSlidedeck_IQRobjects.R | Date: 2026-06-09 09:48:16.673334</a:t>
+              <a:t>IQSlidedeck_IQRobjects.R | Date: 2026-06-25 13:43:43.642429</a:t>
             </a:r>
           </a:p>
         </p:txBody>
@@ -9071,7 +9071,7 @@
           <a:p>
             <a:r>
               <a:rPr/>
-              <a:t>IQSlidedeck_IQRobjects.R | Date: 2026-06-09 09:48:20.406817</a:t>
+              <a:t>IQSlidedeck_IQRobjects.R | Date: 2026-06-25 13:43:46.645864</a:t>
             </a:r>
           </a:p>
         </p:txBody>
@@ -9204,7 +9204,7 @@
           <a:p>
             <a:r>
               <a:rPr/>
-              <a:t>IQSlidedeck_IQRobjects.R | Date: 2026-06-09 09:48:24.229172</a:t>
+              <a:t>IQSlidedeck_IQRobjects.R | Date: 2026-06-25 13:43:50.819413</a:t>
             </a:r>
           </a:p>
         </p:txBody>
@@ -9337,7 +9337,7 @@
           <a:p>
             <a:r>
               <a:rPr/>
-              <a:t>IQSlidedeck_IQRobjects.R | Date: 2026-06-09 09:48:27.041398</a:t>
+              <a:t>IQSlidedeck_IQRobjects.R | Date: 2026-06-25 13:43:53.626263</a:t>
             </a:r>
           </a:p>
         </p:txBody>
@@ -9524,7 +9524,7 @@
           <a:p>
             <a:r>
               <a:rPr/>
-              <a:t>IQSlidedeck_IQRobjects.R | Date: 2026-06-09 09:48:28.695461</a:t>
+              <a:t>IQSlidedeck_IQRobjects.R | Date: 2026-06-25 13:43:55.554646</a:t>
             </a:r>
           </a:p>
         </p:txBody>
@@ -9636,7 +9636,7 @@
           <a:p>
             <a:r>
               <a:rPr/>
-              <a:t>script_IQSlidedeck.R | Date: 2026-06-09 09:47:06.003796</a:t>
+              <a:t>script_IQSlidedeck.R | Date: 2026-06-25 13:42:33.134877</a:t>
             </a:r>
           </a:p>
         </p:txBody>
@@ -9853,7 +9853,7 @@
           <a:p>
             <a:r>
               <a:rPr/>
-              <a:t>script_IQSlidedeck.R | Date: 2026-06-09 09:47:06.191096</a:t>
+              <a:t>script_IQSlidedeck.R | Date: 2026-06-25 13:42:33.318072</a:t>
             </a:r>
           </a:p>
         </p:txBody>
@@ -9958,7 +9958,7 @@
           <a:p>
             <a:r>
               <a:rPr/>
-              <a:t>script_IQSlidedeck.R | Date: 2026-06-09 09:47:10.047847</a:t>
+              <a:t>script_IQSlidedeck.R | Date: 2026-06-25 13:42:38.134802</a:t>
             </a:r>
           </a:p>
         </p:txBody>
@@ -10063,7 +10063,7 @@
           <a:p>
             <a:r>
               <a:rPr/>
-              <a:t>script_IQSlidedeck.R | Date: 2026-06-09 09:47:11.742142</a:t>
+              <a:t>script_IQSlidedeck.R | Date: 2026-06-25 13:42:39.88711</a:t>
             </a:r>
           </a:p>
         </p:txBody>
@@ -10168,7 +10168,7 @@
           <a:p>
             <a:r>
               <a:rPr/>
-              <a:t>script_IQSlidedeck.R | Date: 2026-06-09 09:47:16.873372</a:t>
+              <a:t>script_IQSlidedeck.R | Date: 2026-06-25 13:42:46.922015</a:t>
             </a:r>
           </a:p>
         </p:txBody>
